--- a/docs/02_User_Manual_Summary.pptx
+++ b/docs/02_User_Manual_Summary.pptx
@@ -15,6 +15,7 @@
     <p:sldId id="263" r:id="rId14"/>
     <p:sldId id="264" r:id="rId15"/>
     <p:sldId id="265" r:id="rId16"/>
+    <p:sldId id="266" r:id="rId17"/>
   </p:sldIdLst>
   <p:sldSz cx="12191695" cy="6858000" type="screen4x3"/>
   <p:notesSz cx="6858000" cy="9144000"/>
@@ -3408,7 +3409,7 @@
                 </a:solidFill>
                 <a:latin typeface="Segoe UI Semibold"/>
               </a:rPr>
-              <a:t>Good to know</a:t>
+              <a:t>The other frameworks (same tool)</a:t>
             </a:r>
           </a:p>
         </p:txBody>
@@ -3465,8 +3466,50 @@
         </p:nvSpPr>
         <p:spPr>
           <a:xfrm>
-            <a:off x="640080" y="1600200"/>
-            <a:ext cx="10972800" cy="4251960"/>
+            <a:off x="566928" y="1600200"/>
+            <a:ext cx="11064240" cy="640080"/>
+          </a:xfrm>
+          <a:prstGeom prst="rect">
+            <a:avLst/>
+          </a:prstGeom>
+          <a:noFill/>
+        </p:spPr>
+        <p:txBody>
+          <a:bodyPr wrap="square" anchor="t">
+            <a:spAutoFit/>
+          </a:bodyPr>
+          <a:lstStyle/>
+          <a:p>
+            <a:pPr algn="l">
+              <a:spcBef>
+                <a:spcPts val="0"/>
+              </a:spcBef>
+              <a:spcAft>
+                <a:spcPts val="600"/>
+              </a:spcAft>
+            </a:pPr>
+            <a:r>
+              <a:rPr sz="1500" b="0">
+                <a:solidFill>
+                  <a:srgbClr val="5B6675"/>
+                </a:solidFill>
+                <a:latin typeface="Segoe UI"/>
+              </a:rPr>
+              <a:t>Open each at apps.p3mai.com/prince2 · /msp · /safe.</a:t>
+            </a:r>
+          </a:p>
+        </p:txBody>
+      </p:sp>
+      <p:sp>
+        <p:nvSpPr>
+          <p:cNvPr id="5" name="TextBox 4"/>
+          <p:cNvSpPr txBox="1"/>
+          <p:nvPr/>
+        </p:nvSpPr>
+        <p:spPr>
+          <a:xfrm>
+            <a:off x="640080" y="2377440"/>
+            <a:ext cx="10972800" cy="3474720"/>
           </a:xfrm>
           <a:prstGeom prst="rect">
             <a:avLst/>
@@ -3494,7 +3537,7 @@
                 </a:solidFill>
                 <a:latin typeface="Segoe UI"/>
               </a:rPr>
-              <a:t>•  First load after a quiet spell can take up to a minute (the app wakes).</a:t>
+              <a:t>•  MSP 5th ed — programme processes across Identify → Define → Delivery ⟳ → Close; codes C/P/N, CO/CR/RF/RV/UP/IM.</a:t>
             </a:r>
           </a:p>
           <a:p>
@@ -3513,7 +3556,7 @@
                 </a:solidFill>
                 <a:latin typeface="Segoe UI"/>
               </a:rPr>
-              <a:t>•  A dashed ring means the data is indicative — verify before formal use.</a:t>
+              <a:t>•  SAFe 6.0 Essential — events across the PI cadence (PI Planning → Iterations ⟳ → IP → Inspect &amp; Adapt); codes F/A/P/I and I/C/U/R/E.</a:t>
             </a:r>
           </a:p>
           <a:p>
@@ -3532,14 +3575,14 @@
                 </a:solidFill>
                 <a:latin typeface="Segoe UI"/>
               </a:rPr>
-              <a:t>•  Authoring mode (password) lets authorised users correct the data.</a:t>
-            </a:r>
-          </a:p>
-        </p:txBody>
-      </p:sp>
-      <p:sp>
-        <p:nvSpPr>
-          <p:cNvPr id="5" name="TextBox 4"/>
+              <a:t>•  Same screens and exports; only the layers and codes differ. The Guide always describes the map you're on.</a:t>
+            </a:r>
+          </a:p>
+        </p:txBody>
+      </p:sp>
+      <p:sp>
+        <p:nvSpPr>
+          <p:cNvPr id="6" name="TextBox 5"/>
           <p:cNvSpPr txBox="1"/>
           <p:nvPr/>
         </p:nvSpPr>
@@ -3581,7 +3624,7 @@
       </p:sp>
       <p:sp>
         <p:nvSpPr>
-          <p:cNvPr id="6" name="TextBox 5"/>
+          <p:cNvPr id="7" name="TextBox 6"/>
           <p:cNvSpPr txBox="1"/>
           <p:nvPr/>
         </p:nvSpPr>
@@ -3617,6 +3660,274 @@
                 <a:latin typeface="Segoe UI"/>
               </a:rPr>
               <a:t>DOC-02  ·  10</a:t>
+            </a:r>
+          </a:p>
+        </p:txBody>
+      </p:sp>
+    </p:spTree>
+  </p:cSld>
+  <p:clrMapOvr>
+    <a:masterClrMapping/>
+  </p:clrMapOvr>
+</p:sld>
+</file>
+
+<file path=ppt/slides/slide11.xml><?xml version="1.0" encoding="utf-8"?>
+<p:sld xmlns:a="http://schemas.openxmlformats.org/drawingml/2006/main" xmlns:p="http://schemas.openxmlformats.org/presentationml/2006/main" xmlns:r="http://schemas.openxmlformats.org/officeDocument/2006/relationships">
+  <p:cSld>
+    <p:spTree>
+      <p:nvGrpSpPr>
+        <p:cNvPr id="1" name=""/>
+        <p:cNvGrpSpPr/>
+        <p:nvPr/>
+      </p:nvGrpSpPr>
+      <p:grpSpPr/>
+      <p:sp>
+        <p:nvSpPr>
+          <p:cNvPr id="2" name="TextBox 1"/>
+          <p:cNvSpPr txBox="1"/>
+          <p:nvPr/>
+        </p:nvSpPr>
+        <p:spPr>
+          <a:xfrm>
+            <a:off x="548640" y="411480"/>
+            <a:ext cx="10972800" cy="914400"/>
+          </a:xfrm>
+          <a:prstGeom prst="rect">
+            <a:avLst/>
+          </a:prstGeom>
+          <a:noFill/>
+        </p:spPr>
+        <p:txBody>
+          <a:bodyPr wrap="square" anchor="t">
+            <a:spAutoFit/>
+          </a:bodyPr>
+          <a:lstStyle/>
+          <a:p>
+            <a:pPr algn="l">
+              <a:spcBef>
+                <a:spcPts val="0"/>
+              </a:spcBef>
+              <a:spcAft>
+                <a:spcPts val="600"/>
+              </a:spcAft>
+            </a:pPr>
+            <a:r>
+              <a:rPr sz="2600" b="1">
+                <a:solidFill>
+                  <a:srgbClr val="0B2545"/>
+                </a:solidFill>
+                <a:latin typeface="Segoe UI Semibold"/>
+              </a:rPr>
+              <a:t>Good to know</a:t>
+            </a:r>
+          </a:p>
+        </p:txBody>
+      </p:sp>
+      <p:sp>
+        <p:nvSpPr>
+          <p:cNvPr id="3" name="Rectangle 2"/>
+          <p:cNvSpPr/>
+          <p:nvPr/>
+        </p:nvSpPr>
+        <p:spPr>
+          <a:xfrm>
+            <a:off x="566928" y="1207008"/>
+            <a:ext cx="2926080" cy="38100"/>
+          </a:xfrm>
+          <a:prstGeom prst="rect">
+            <a:avLst/>
+          </a:prstGeom>
+          <a:solidFill>
+            <a:srgbClr val="C9A227"/>
+          </a:solidFill>
+          <a:ln>
+            <a:noFill/>
+          </a:ln>
+          <a:effectLst/>
+        </p:spPr>
+        <p:style>
+          <a:lnRef idx="1">
+            <a:schemeClr val="accent1"/>
+          </a:lnRef>
+          <a:fillRef idx="3">
+            <a:schemeClr val="accent1"/>
+          </a:fillRef>
+          <a:effectRef idx="2">
+            <a:schemeClr val="accent1"/>
+          </a:effectRef>
+          <a:fontRef idx="minor">
+            <a:schemeClr val="lt1"/>
+          </a:fontRef>
+        </p:style>
+        <p:txBody>
+          <a:bodyPr rtlCol="0" anchor="ctr"/>
+          <a:lstStyle/>
+          <a:p>
+            <a:pPr algn="ctr"/>
+          </a:p>
+        </p:txBody>
+      </p:sp>
+      <p:sp>
+        <p:nvSpPr>
+          <p:cNvPr id="4" name="TextBox 3"/>
+          <p:cNvSpPr txBox="1"/>
+          <p:nvPr/>
+        </p:nvSpPr>
+        <p:spPr>
+          <a:xfrm>
+            <a:off x="640080" y="1600200"/>
+            <a:ext cx="10972800" cy="4251960"/>
+          </a:xfrm>
+          <a:prstGeom prst="rect">
+            <a:avLst/>
+          </a:prstGeom>
+          <a:noFill/>
+        </p:spPr>
+        <p:txBody>
+          <a:bodyPr wrap="square" anchor="t">
+            <a:spAutoFit/>
+          </a:bodyPr>
+          <a:lstStyle/>
+          <a:p>
+            <a:pPr algn="l">
+              <a:spcBef>
+                <a:spcPts val="0"/>
+              </a:spcBef>
+              <a:spcAft>
+                <a:spcPts val="1200"/>
+              </a:spcAft>
+            </a:pPr>
+            <a:r>
+              <a:rPr sz="1700" b="0">
+                <a:solidFill>
+                  <a:srgbClr val="1C2B3A"/>
+                </a:solidFill>
+                <a:latin typeface="Segoe UI"/>
+              </a:rPr>
+              <a:t>•  First load after a quiet spell can take up to a minute (the app wakes).</a:t>
+            </a:r>
+          </a:p>
+          <a:p>
+            <a:pPr algn="l">
+              <a:spcBef>
+                <a:spcPts val="0"/>
+              </a:spcBef>
+              <a:spcAft>
+                <a:spcPts val="1200"/>
+              </a:spcAft>
+            </a:pPr>
+            <a:r>
+              <a:rPr sz="1700" b="0">
+                <a:solidFill>
+                  <a:srgbClr val="1C2B3A"/>
+                </a:solidFill>
+                <a:latin typeface="Segoe UI"/>
+              </a:rPr>
+              <a:t>•  A dashed ring means the data is indicative — verify before formal use.</a:t>
+            </a:r>
+          </a:p>
+          <a:p>
+            <a:pPr algn="l">
+              <a:spcBef>
+                <a:spcPts val="0"/>
+              </a:spcBef>
+              <a:spcAft>
+                <a:spcPts val="1200"/>
+              </a:spcAft>
+            </a:pPr>
+            <a:r>
+              <a:rPr sz="1700" b="0">
+                <a:solidFill>
+                  <a:srgbClr val="1C2B3A"/>
+                </a:solidFill>
+                <a:latin typeface="Segoe UI"/>
+              </a:rPr>
+              <a:t>•  Authoring mode (password) lets authorised users correct the data.</a:t>
+            </a:r>
+          </a:p>
+        </p:txBody>
+      </p:sp>
+      <p:sp>
+        <p:nvSpPr>
+          <p:cNvPr id="5" name="TextBox 4"/>
+          <p:cNvSpPr txBox="1"/>
+          <p:nvPr/>
+        </p:nvSpPr>
+        <p:spPr>
+          <a:xfrm>
+            <a:off x="320040" y="6419088"/>
+            <a:ext cx="3657600" cy="365760"/>
+          </a:xfrm>
+          <a:prstGeom prst="rect">
+            <a:avLst/>
+          </a:prstGeom>
+          <a:noFill/>
+        </p:spPr>
+        <p:txBody>
+          <a:bodyPr wrap="square" anchor="t">
+            <a:spAutoFit/>
+          </a:bodyPr>
+          <a:lstStyle/>
+          <a:p>
+            <a:pPr algn="l">
+              <a:spcBef>
+                <a:spcPts val="0"/>
+              </a:spcBef>
+              <a:spcAft>
+                <a:spcPts val="600"/>
+              </a:spcAft>
+            </a:pPr>
+            <a:r>
+              <a:rPr sz="900" b="1">
+                <a:solidFill>
+                  <a:srgbClr val="A8841C"/>
+                </a:solidFill>
+                <a:latin typeface="Segoe UI"/>
+              </a:rPr>
+              <a:t>OFFICIAL</a:t>
+            </a:r>
+          </a:p>
+        </p:txBody>
+      </p:sp>
+      <p:sp>
+        <p:nvSpPr>
+          <p:cNvPr id="6" name="TextBox 5"/>
+          <p:cNvSpPr txBox="1"/>
+          <p:nvPr/>
+        </p:nvSpPr>
+        <p:spPr>
+          <a:xfrm>
+            <a:off x="10789920" y="6419088"/>
+            <a:ext cx="1097280" cy="365760"/>
+          </a:xfrm>
+          <a:prstGeom prst="rect">
+            <a:avLst/>
+          </a:prstGeom>
+          <a:noFill/>
+        </p:spPr>
+        <p:txBody>
+          <a:bodyPr wrap="square" anchor="t">
+            <a:spAutoFit/>
+          </a:bodyPr>
+          <a:lstStyle/>
+          <a:p>
+            <a:pPr algn="r">
+              <a:spcBef>
+                <a:spcPts val="0"/>
+              </a:spcBef>
+              <a:spcAft>
+                <a:spcPts val="600"/>
+              </a:spcAft>
+            </a:pPr>
+            <a:r>
+              <a:rPr sz="900" b="0">
+                <a:solidFill>
+                  <a:srgbClr val="5B6675"/>
+                </a:solidFill>
+                <a:latin typeface="Segoe UI"/>
+              </a:rPr>
+              <a:t>DOC-02  ·  11</a:t>
             </a:r>
           </a:p>
         </p:txBody>
@@ -3762,7 +4073,7 @@
                 </a:solidFill>
                 <a:latin typeface="Segoe UI"/>
               </a:rPr>
-              <a:t>A picture of how PRINCE2 fits together.</a:t>
+              <a:t>A picture of how a method fits together — this deck uses PRINCE2 as the example.</a:t>
             </a:r>
           </a:p>
         </p:txBody>
@@ -3804,7 +4115,7 @@
                 </a:solidFill>
                 <a:latin typeface="Segoe UI"/>
               </a:rPr>
-              <a:t>•  Turns the PRINCE2 cross-reference into an explorable network.</a:t>
+              <a:t>•  Turns a method's cross-reference into an explorable network — PRINCE2, MSP or SAFe.</a:t>
             </a:r>
           </a:p>
           <a:p>
@@ -3823,7 +4134,7 @@
                 </a:solidFill>
                 <a:latin typeface="Segoe UI"/>
               </a:rPr>
-              <a:t>•  See which roles, practices, approaches and products each activity touches.</a:t>
+              <a:t>•  See which roles, practices/competencies, and products/artefacts each activity touches.</a:t>
             </a:r>
           </a:p>
           <a:p>
@@ -3842,7 +4153,7 @@
                 </a:solidFill>
                 <a:latin typeface="Segoe UI"/>
               </a:rPr>
-              <a:t>•  Tailor projects, onboard teams, and explain governance visually.</a:t>
+              <a:t>•  Tailor engagements, onboard teams, and explain governance visually.</a:t>
             </a:r>
           </a:p>
         </p:txBody>

--- a/docs/02_User_Manual_Summary.pptx
+++ b/docs/02_User_Manual_Summary.pptx
@@ -3495,7 +3495,7 @@
                 </a:solidFill>
                 <a:latin typeface="Segoe UI"/>
               </a:rPr>
-              <a:t>Open each at apps.p3mai.com/prince2 · /msp · /safe.</a:t>
+              <a:t>Open each at apps.p3mai.com/prince2 · /msp · /safe · /pmbok.</a:t>
             </a:r>
           </a:p>
         </p:txBody>
@@ -3557,6 +3557,25 @@
                 <a:latin typeface="Segoe UI"/>
               </a:rPr>
               <a:t>•  SAFe 6.0 Essential — events across the PI cadence (PI Planning → Iterations ⟳ → IP → Inspect &amp; Adapt); codes F/A/P/I and I/C/U/R/E.</a:t>
+            </a:r>
+          </a:p>
+          <a:p>
+            <a:pPr algn="l">
+              <a:spcBef>
+                <a:spcPts val="0"/>
+              </a:spcBef>
+              <a:spcAft>
+                <a:spcPts val="1200"/>
+              </a:spcAft>
+            </a:pPr>
+            <a:r>
+              <a:rPr sz="1700" b="0">
+                <a:solidFill>
+                  <a:srgbClr val="1C2B3A"/>
+                </a:solidFill>
+                <a:latin typeface="Segoe UI"/>
+              </a:rPr>
+              <a:t>•  PMBOK 6th ed — the 49-process matrix, 10 Knowledge Areas × 5 Process Groups; codes I/O (inputs/outputs) and T (tools).</a:t>
             </a:r>
           </a:p>
           <a:p>

--- a/docs/02_User_Manual_Summary.pptx
+++ b/docs/02_User_Manual_Summary.pptx
@@ -5418,6 +5418,25 @@
                 <a:latin typeface="Segoe UI"/>
               </a:rPr>
               <a:t>•  Play to auto-advance; Spotlight one stage, or Cumulative to build up.</a:t>
+            </a:r>
+          </a:p>
+          <a:p>
+            <a:pPr algn="l">
+              <a:spcBef>
+                <a:spcPts val="0"/>
+              </a:spcBef>
+              <a:spcAft>
+                <a:spcPts val="1200"/>
+              </a:spcAft>
+            </a:pPr>
+            <a:r>
+              <a:rPr sz="1700" b="0">
+                <a:solidFill>
+                  <a:srgbClr val="1C2B3A"/>
+                </a:solidFill>
+                <a:latin typeface="Segoe UI"/>
+              </a:rPr>
+              <a:t>•  Reset (gold button) clears the selection and scrubber back to the full view.</a:t>
             </a:r>
           </a:p>
         </p:txBody>
